--- a/presentation/DA1_Presentation.pptx
+++ b/presentation/DA1_Presentation.pptx
@@ -3213,6 +3213,41 @@
           </a:p>
         </p:txBody>
       </p:sp>
+      <p:sp>
+        <p:nvSpPr>
+          <p:cNvPr id="5" name="TextBox 4"/>
+          <p:cNvSpPr txBox="1"/>
+          <p:nvPr/>
+        </p:nvSpPr>
+        <p:spPr>
+          <a:xfrm>
+            <a:off x="731520" y="5394960"/>
+            <a:ext cx="10698480" cy="457200"/>
+          </a:xfrm>
+          <a:prstGeom prst="rect">
+            <a:avLst/>
+          </a:prstGeom>
+          <a:noFill/>
+        </p:spPr>
+        <p:txBody>
+          <a:bodyPr wrap="square">
+            <a:spAutoFit/>
+          </a:bodyPr>
+          <a:lstStyle/>
+          <a:p>
+            <a:pPr algn="ctr"/>
+            <a:r>
+              <a:rPr sz="1700" b="1" i="0">
+                <a:solidFill>
+                  <a:srgbClr val="FFFFFF"/>
+                </a:solidFill>
+                <a:latin typeface="Calibri"/>
+              </a:rPr>
+              <a:t>Avi Dhandhania (25BCE1207)   •   Shivesh Kumar (25BCE1067)</a:t>
+            </a:r>
+          </a:p>
+        </p:txBody>
+      </p:sp>
     </p:spTree>
   </p:cSld>
   <p:clrMapOvr>
@@ -5274,8 +5309,8 @@
         </p:blipFill>
         <p:spPr>
           <a:xfrm>
-            <a:off x="2358237" y="1097280"/>
-            <a:ext cx="7475219" cy="5120640"/>
+            <a:off x="2581788" y="1097280"/>
+            <a:ext cx="7028118" cy="5120640"/>
           </a:xfrm>
           <a:prstGeom prst="rect">
             <a:avLst/>

--- a/presentation/DA1_Presentation.pptx
+++ b/presentation/DA1_Presentation.pptx
@@ -18,6 +18,8 @@
     <p:sldId id="266" r:id="rId17"/>
     <p:sldId id="267" r:id="rId18"/>
     <p:sldId id="268" r:id="rId19"/>
+    <p:sldId id="269" r:id="rId20"/>
+    <p:sldId id="270" r:id="rId21"/>
   </p:sldIdLst>
   <p:sldSz cx="12191695" cy="6858000" type="screen4x3"/>
   <p:notesSz cx="6858000" cy="9144000"/>
@@ -3138,7 +3140,7 @@
                 </a:solidFill>
                 <a:latin typeface="Calibri"/>
               </a:rPr>
-              <a:t>Blockchain-Based Carbon Credit Trading System</a:t>
+              <a:t>Blockchain Based Carbon Credit Trading System</a:t>
             </a:r>
           </a:p>
         </p:txBody>
@@ -3173,7 +3175,7 @@
                 </a:solidFill>
                 <a:latin typeface="Calibri"/>
               </a:rPr>
-              <a:t>Digital Assignment 1 (DA1)  •  Blockchain Technology</a:t>
+              <a:t>Digital Assignment 1 (DA1)  |  Blockchain Technology</a:t>
             </a:r>
           </a:p>
         </p:txBody>
@@ -3208,7 +3210,7 @@
                 </a:solidFill>
                 <a:latin typeface="Calibri"/>
               </a:rPr>
-              <a:t>SDG 13 — Climate Action   |   Supporting SDG 7 &amp; SDG 12</a:t>
+              <a:t>SDG 13, Climate Action   |   also supports SDG 7 and SDG 12</a:t>
             </a:r>
           </a:p>
         </p:txBody>
@@ -3243,7 +3245,7 @@
                 </a:solidFill>
                 <a:latin typeface="Calibri"/>
               </a:rPr>
-              <a:t>Avi Dhandhania (25BCE1207)   •   Shivesh Kumar (25BCE1067)</a:t>
+              <a:t>Avi Dhandhania (25BCE1207)    Shivesh Kumar (25BCE1067)</a:t>
             </a:r>
           </a:p>
         </p:txBody>
@@ -3347,7 +3349,7 @@
                 </a:solidFill>
                 <a:latin typeface="Calibri"/>
               </a:rPr>
-              <a:t>4. Sequence — Buy &amp; Retire</a:t>
+              <a:t>4. Sequence: Buy and Retire</a:t>
             </a:r>
           </a:p>
         </p:txBody>
@@ -3475,14 +3477,14 @@
                 </a:solidFill>
                 <a:latin typeface="Calibri"/>
               </a:rPr>
-              <a:t>5. Project Plan — Gantt Chart</a:t>
+              <a:t>4. What is New: Verifiers Stake Money</a:t>
             </a:r>
           </a:p>
         </p:txBody>
       </p:sp>
       <p:pic>
         <p:nvPicPr>
-          <p:cNvPr id="4" name="Picture 3" descr="gantt.png"/>
+          <p:cNvPr id="4" name="Picture 3" descr="novelty.png"/>
           <p:cNvPicPr>
             <a:picLocks noChangeAspect="1"/>
           </p:cNvPicPr>
@@ -3496,8 +3498,8 @@
         </p:blipFill>
         <p:spPr>
           <a:xfrm>
-            <a:off x="1349641" y="1097280"/>
-            <a:ext cx="9492411" cy="5120640"/>
+            <a:off x="1612716" y="1097280"/>
+            <a:ext cx="8966261" cy="5120640"/>
           </a:xfrm>
           <a:prstGeom prst="rect">
             <a:avLst/>
@@ -3603,7 +3605,7 @@
                 </a:solidFill>
                 <a:latin typeface="Calibri"/>
               </a:rPr>
-              <a:t>5. Feasibility</a:t>
+              <a:t>4. What is New, in Three Parts</a:t>
             </a:r>
           </a:p>
         </p:txBody>
@@ -3616,7 +3618,42 @@
         </p:nvSpPr>
         <p:spPr>
           <a:xfrm>
-            <a:off x="640080" y="1371600"/>
+            <a:off x="457200" y="1143000"/>
+            <a:ext cx="11247120" cy="457200"/>
+          </a:xfrm>
+          <a:prstGeom prst="rect">
+            <a:avLst/>
+          </a:prstGeom>
+          <a:noFill/>
+        </p:spPr>
+        <p:txBody>
+          <a:bodyPr wrap="square">
+            <a:spAutoFit/>
+          </a:bodyPr>
+          <a:lstStyle/>
+          <a:p>
+            <a:pPr algn="l"/>
+            <a:r>
+              <a:rPr sz="1500" b="0" i="1">
+                <a:solidFill>
+                  <a:srgbClr val="2A9D8F"/>
+                </a:solidFill>
+                <a:latin typeface="Calibri"/>
+              </a:rPr>
+              <a:t>Closing G4: the gap every other design leaves open</a:t>
+            </a:r>
+          </a:p>
+        </p:txBody>
+      </p:sp>
+      <p:sp>
+        <p:nvSpPr>
+          <p:cNvPr id="5" name="TextBox 4"/>
+          <p:cNvSpPr txBox="1"/>
+          <p:nvPr/>
+        </p:nvSpPr>
+        <p:spPr>
+          <a:xfrm>
+            <a:off x="640080" y="1828800"/>
             <a:ext cx="10972800" cy="4754880"/>
           </a:xfrm>
           <a:prstGeom prst="rect">
@@ -3636,13 +3673,13 @@
               </a:spcAft>
             </a:pPr>
             <a:r>
-              <a:rPr sz="1800">
+              <a:rPr sz="1500">
                 <a:solidFill>
                   <a:srgbClr val="222222"/>
                 </a:solidFill>
                 <a:latin typeface="Calibri"/>
               </a:rPr>
-              <a:t>•  Technical — HIGH: mature open-source stack (Solidity, OpenZeppelin, Hardhat, React, MetaMask, IPFS).</a:t>
+              <a:t>•  Verifiers put money at risk. A deposit is locked before approval and stays locked for a 90 day challenge window. Anyone can challenge with a bond and evidence. If the challenge wins, the stake is slashed: part to the challenger, part to a pool for the buyers.</a:t>
             </a:r>
           </a:p>
           <a:p>
@@ -3652,13 +3689,13 @@
               </a:spcAft>
             </a:pPr>
             <a:r>
-              <a:rPr sz="1800">
+              <a:rPr sz="1500">
                 <a:solidFill>
                   <a:srgbClr val="222222"/>
                 </a:solidFill>
                 <a:latin typeface="Calibri"/>
               </a:rPr>
-              <a:t>•  Economic — HIGH: free testnets &amp; tooling; production gas cut via Layer-2.</a:t>
+              <a:t>•  Every credit can be traced and flagged. A batch stores its project, its verifier and the evidence hash, so a fake project's credits can be named and marked instead of quietly poisoning a shared pool.</a:t>
             </a:r>
           </a:p>
           <a:p>
@@ -3668,13 +3705,13 @@
               </a:spcAft>
             </a:pPr>
             <a:r>
-              <a:rPr sz="1800">
+              <a:rPr sz="1500">
                 <a:solidFill>
                   <a:srgbClr val="222222"/>
                 </a:solidFill>
                 <a:latin typeface="Calibri"/>
               </a:rPr>
-              <a:t>•  Operational — MEDIUM: needs verifier &amp; regulator buy-in; complements existing registries.</a:t>
+              <a:t>•  The retirement certificate cannot be traded. Burning credits mints a soulbound ERC-721 to the buyer, so an offset claim has a public owner and cannot be resold as proof to a second company.</a:t>
             </a:r>
           </a:p>
           <a:p>
@@ -3684,29 +3721,13 @@
               </a:spcAft>
             </a:pPr>
             <a:r>
-              <a:rPr sz="1800">
+              <a:rPr sz="1500">
                 <a:solidFill>
                   <a:srgbClr val="222222"/>
                 </a:solidFill>
                 <a:latin typeface="Calibri"/>
               </a:rPr>
-              <a:t>•  Schedule — HIGH: 11-week plan fits one semester.</a:t>
-            </a:r>
-          </a:p>
-          <a:p>
-            <a:pPr>
-              <a:spcAft>
-                <a:spcPts val="1000"/>
-              </a:spcAft>
-            </a:pPr>
-            <a:r>
-              <a:rPr sz="1800">
-                <a:solidFill>
-                  <a:srgbClr val="222222"/>
-                </a:solidFill>
-                <a:latin typeface="Calibri"/>
-              </a:rPr>
-              <a:t>•  Key risk: 'garbage-in' off-chain data → mitigated by multiple attestations + IPFS evidence.</a:t>
+              <a:t>•  The point: the chain stops being only a filing cabinet that records whatever it is told, including lies. Approving a fake project stops being free.</a:t>
             </a:r>
           </a:p>
         </p:txBody>
@@ -3720,6 +3741,341 @@
 </file>
 
 <file path=ppt/slides/slide13.xml><?xml version="1.0" encoding="utf-8"?>
+<p:sld xmlns:a="http://schemas.openxmlformats.org/drawingml/2006/main" xmlns:p="http://schemas.openxmlformats.org/presentationml/2006/main" xmlns:r="http://schemas.openxmlformats.org/officeDocument/2006/relationships">
+  <p:cSld>
+    <p:bg>
+      <p:bgPr>
+        <a:solidFill>
+          <a:srgbClr val="FFFFFF"/>
+        </a:solidFill>
+        <a:effectLst/>
+      </p:bgPr>
+    </p:bg>
+    <p:spTree>
+      <p:nvGrpSpPr>
+        <p:cNvPr id="1" name=""/>
+        <p:cNvGrpSpPr/>
+        <p:nvPr/>
+      </p:nvGrpSpPr>
+      <p:grpSpPr/>
+      <p:sp>
+        <p:nvSpPr>
+          <p:cNvPr id="2" name="Rectangle 1"/>
+          <p:cNvSpPr/>
+          <p:nvPr/>
+        </p:nvSpPr>
+        <p:spPr>
+          <a:xfrm>
+            <a:off x="0" y="0"/>
+            <a:ext cx="12191695" cy="914400"/>
+          </a:xfrm>
+          <a:prstGeom prst="rect">
+            <a:avLst/>
+          </a:prstGeom>
+          <a:solidFill>
+            <a:srgbClr val="1F3A5F"/>
+          </a:solidFill>
+          <a:ln>
+            <a:noFill/>
+          </a:ln>
+        </p:spPr>
+        <p:style>
+          <a:lnRef idx="1">
+            <a:schemeClr val="accent1"/>
+          </a:lnRef>
+          <a:fillRef idx="3">
+            <a:schemeClr val="accent1"/>
+          </a:fillRef>
+          <a:effectRef idx="2">
+            <a:schemeClr val="accent1"/>
+          </a:effectRef>
+          <a:fontRef idx="minor">
+            <a:schemeClr val="lt1"/>
+          </a:fontRef>
+        </p:style>
+        <p:txBody>
+          <a:bodyPr rtlCol="0" anchor="ctr"/>
+          <a:lstStyle/>
+          <a:p>
+            <a:pPr algn="ctr"/>
+          </a:p>
+        </p:txBody>
+      </p:sp>
+      <p:sp>
+        <p:nvSpPr>
+          <p:cNvPr id="3" name="TextBox 2"/>
+          <p:cNvSpPr txBox="1"/>
+          <p:nvPr/>
+        </p:nvSpPr>
+        <p:spPr>
+          <a:xfrm>
+            <a:off x="457200" y="164592"/>
+            <a:ext cx="11247120" cy="640080"/>
+          </a:xfrm>
+          <a:prstGeom prst="rect">
+            <a:avLst/>
+          </a:prstGeom>
+          <a:noFill/>
+        </p:spPr>
+        <p:txBody>
+          <a:bodyPr wrap="square">
+            <a:spAutoFit/>
+          </a:bodyPr>
+          <a:lstStyle/>
+          <a:p>
+            <a:pPr algn="l"/>
+            <a:r>
+              <a:rPr sz="2600" b="1" i="0">
+                <a:solidFill>
+                  <a:srgbClr val="FFFFFF"/>
+                </a:solidFill>
+                <a:latin typeface="Calibri"/>
+              </a:rPr>
+              <a:t>5. Project Plan</a:t>
+            </a:r>
+          </a:p>
+        </p:txBody>
+      </p:sp>
+      <p:pic>
+        <p:nvPicPr>
+          <p:cNvPr id="4" name="Picture 3" descr="gantt.png"/>
+          <p:cNvPicPr>
+            <a:picLocks noChangeAspect="1"/>
+          </p:cNvPicPr>
+          <p:nvPr/>
+        </p:nvPicPr>
+        <p:blipFill>
+          <a:blip r:embed="rId2"/>
+          <a:stretch>
+            <a:fillRect/>
+          </a:stretch>
+        </p:blipFill>
+        <p:spPr>
+          <a:xfrm>
+            <a:off x="838047" y="1097280"/>
+            <a:ext cx="10515600" cy="4616159"/>
+          </a:xfrm>
+          <a:prstGeom prst="rect">
+            <a:avLst/>
+          </a:prstGeom>
+        </p:spPr>
+      </p:pic>
+    </p:spTree>
+  </p:cSld>
+  <p:clrMapOvr>
+    <a:masterClrMapping/>
+  </p:clrMapOvr>
+</p:sld>
+</file>
+
+<file path=ppt/slides/slide14.xml><?xml version="1.0" encoding="utf-8"?>
+<p:sld xmlns:a="http://schemas.openxmlformats.org/drawingml/2006/main" xmlns:p="http://schemas.openxmlformats.org/presentationml/2006/main" xmlns:r="http://schemas.openxmlformats.org/officeDocument/2006/relationships">
+  <p:cSld>
+    <p:bg>
+      <p:bgPr>
+        <a:solidFill>
+          <a:srgbClr val="FFFFFF"/>
+        </a:solidFill>
+        <a:effectLst/>
+      </p:bgPr>
+    </p:bg>
+    <p:spTree>
+      <p:nvGrpSpPr>
+        <p:cNvPr id="1" name=""/>
+        <p:cNvGrpSpPr/>
+        <p:nvPr/>
+      </p:nvGrpSpPr>
+      <p:grpSpPr/>
+      <p:sp>
+        <p:nvSpPr>
+          <p:cNvPr id="2" name="Rectangle 1"/>
+          <p:cNvSpPr/>
+          <p:nvPr/>
+        </p:nvSpPr>
+        <p:spPr>
+          <a:xfrm>
+            <a:off x="0" y="0"/>
+            <a:ext cx="12191695" cy="1051560"/>
+          </a:xfrm>
+          <a:prstGeom prst="rect">
+            <a:avLst/>
+          </a:prstGeom>
+          <a:solidFill>
+            <a:srgbClr val="1F3A5F"/>
+          </a:solidFill>
+          <a:ln>
+            <a:noFill/>
+          </a:ln>
+        </p:spPr>
+        <p:style>
+          <a:lnRef idx="1">
+            <a:schemeClr val="accent1"/>
+          </a:lnRef>
+          <a:fillRef idx="3">
+            <a:schemeClr val="accent1"/>
+          </a:fillRef>
+          <a:effectRef idx="2">
+            <a:schemeClr val="accent1"/>
+          </a:effectRef>
+          <a:fontRef idx="minor">
+            <a:schemeClr val="lt1"/>
+          </a:fontRef>
+        </p:style>
+        <p:txBody>
+          <a:bodyPr rtlCol="0" anchor="ctr"/>
+          <a:lstStyle/>
+          <a:p>
+            <a:pPr algn="ctr"/>
+          </a:p>
+        </p:txBody>
+      </p:sp>
+      <p:sp>
+        <p:nvSpPr>
+          <p:cNvPr id="3" name="TextBox 2"/>
+          <p:cNvSpPr txBox="1"/>
+          <p:nvPr/>
+        </p:nvSpPr>
+        <p:spPr>
+          <a:xfrm>
+            <a:off x="457200" y="201168"/>
+            <a:ext cx="11247120" cy="731520"/>
+          </a:xfrm>
+          <a:prstGeom prst="rect">
+            <a:avLst/>
+          </a:prstGeom>
+          <a:noFill/>
+        </p:spPr>
+        <p:txBody>
+          <a:bodyPr wrap="square">
+            <a:spAutoFit/>
+          </a:bodyPr>
+          <a:lstStyle/>
+          <a:p>
+            <a:pPr algn="l"/>
+            <a:r>
+              <a:rPr sz="2800" b="1" i="0">
+                <a:solidFill>
+                  <a:srgbClr val="FFFFFF"/>
+                </a:solidFill>
+                <a:latin typeface="Calibri"/>
+              </a:rPr>
+              <a:t>5. Feasibility and Risks</a:t>
+            </a:r>
+          </a:p>
+        </p:txBody>
+      </p:sp>
+      <p:sp>
+        <p:nvSpPr>
+          <p:cNvPr id="4" name="TextBox 3"/>
+          <p:cNvSpPr txBox="1"/>
+          <p:nvPr/>
+        </p:nvSpPr>
+        <p:spPr>
+          <a:xfrm>
+            <a:off x="640080" y="1371600"/>
+            <a:ext cx="10972800" cy="4754880"/>
+          </a:xfrm>
+          <a:prstGeom prst="rect">
+            <a:avLst/>
+          </a:prstGeom>
+          <a:noFill/>
+        </p:spPr>
+        <p:txBody>
+          <a:bodyPr wrap="square">
+            <a:spAutoFit/>
+          </a:bodyPr>
+          <a:lstStyle/>
+          <a:p>
+            <a:pPr>
+              <a:spcAft>
+                <a:spcPts val="1000"/>
+              </a:spcAft>
+            </a:pPr>
+            <a:r>
+              <a:rPr sz="1700">
+                <a:solidFill>
+                  <a:srgbClr val="222222"/>
+                </a:solidFill>
+                <a:latin typeface="Calibri"/>
+              </a:rPr>
+              <a:t>•  Technical: high. Every piece is open source and proven. Slashing escrow is a known pattern we can copy.</a:t>
+            </a:r>
+          </a:p>
+          <a:p>
+            <a:pPr>
+              <a:spcAft>
+                <a:spcPts val="1000"/>
+              </a:spcAft>
+            </a:pPr>
+            <a:r>
+              <a:rPr sz="1700">
+                <a:solidFill>
+                  <a:srgbClr val="222222"/>
+                </a:solidFill>
+                <a:latin typeface="Calibri"/>
+              </a:rPr>
+              <a:t>•  Economic: high. Testnets and tooling are free, and Layer 2 keeps production gas at cents per transaction.</a:t>
+            </a:r>
+          </a:p>
+          <a:p>
+            <a:pPr>
+              <a:spcAft>
+                <a:spcPts val="1000"/>
+              </a:spcAft>
+            </a:pPr>
+            <a:r>
+              <a:rPr sz="1700">
+                <a:solidFill>
+                  <a:srgbClr val="222222"/>
+                </a:solidFill>
+                <a:latin typeface="Calibri"/>
+              </a:rPr>
+              <a:t>•  Operational: medium. Needs verifiers willing to post a deposit and a regulator to rule on challenges. People problems, not code problems.</a:t>
+            </a:r>
+          </a:p>
+          <a:p>
+            <a:pPr>
+              <a:spcAft>
+                <a:spcPts val="1000"/>
+              </a:spcAft>
+            </a:pPr>
+            <a:r>
+              <a:rPr sz="1700">
+                <a:solidFill>
+                  <a:srgbClr val="222222"/>
+                </a:solidFill>
+                <a:latin typeface="Calibri"/>
+              </a:rPr>
+              <a:t>•  Schedule: high. Eleven weeks fits one semester, with overlap for slippage.</a:t>
+            </a:r>
+          </a:p>
+          <a:p>
+            <a:pPr>
+              <a:spcAft>
+                <a:spcPts val="1000"/>
+              </a:spcAft>
+            </a:pPr>
+            <a:r>
+              <a:rPr sz="1700">
+                <a:solidFill>
+                  <a:srgbClr val="222222"/>
+                </a:solidFill>
+                <a:latin typeface="Calibri"/>
+              </a:rPr>
+              <a:t>•  Honest limits: a verifier may still profit more than the stake, and a regulator role judging challenges is one trusted point in a trustless design.</a:t>
+            </a:r>
+          </a:p>
+        </p:txBody>
+      </p:sp>
+    </p:spTree>
+  </p:cSld>
+  <p:clrMapOvr>
+    <a:masterClrMapping/>
+  </p:clrMapOvr>
+</p:sld>
+</file>
+
+<file path=ppt/slides/slide15.xml><?xml version="1.0" encoding="utf-8"?>
 <p:sld xmlns:a="http://schemas.openxmlformats.org/drawingml/2006/main" xmlns:p="http://schemas.openxmlformats.org/presentationml/2006/main" xmlns:r="http://schemas.openxmlformats.org/officeDocument/2006/relationships">
   <p:cSld>
     <p:bg>
@@ -3781,7 +4137,7 @@
         <p:spPr>
           <a:xfrm>
             <a:off x="731520" y="3657600"/>
-            <a:ext cx="10698480" cy="640080"/>
+            <a:ext cx="10698480" cy="822960"/>
           </a:xfrm>
           <a:prstGeom prst="rect">
             <a:avLst/>
@@ -3802,7 +4158,7 @@
                 </a:solidFill>
                 <a:latin typeface="Calibri"/>
               </a:rPr>
-              <a:t>Restoring trust in carbon markets, one immutable credit at a time.</a:t>
+              <a:t>Make the record honest, and make a false record expensive.</a:t>
             </a:r>
           </a:p>
         </p:txBody>
@@ -3945,7 +4301,7 @@
                 </a:solidFill>
                 <a:latin typeface="Calibri"/>
               </a:rPr>
-              <a:t>•  Problem Statement, Objectives &amp; Scope (SDG 13)</a:t>
+              <a:t>•  The problem, our objectives and scope</a:t>
             </a:r>
           </a:p>
           <a:p>
@@ -3961,7 +4317,7 @@
                 </a:solidFill>
                 <a:latin typeface="Calibri"/>
               </a:rPr>
-              <a:t>•  Literature Survey &amp; Research Gap</a:t>
+              <a:t>•  What already exists, and the gaps we found</a:t>
             </a:r>
           </a:p>
           <a:p>
@@ -3977,7 +4333,7 @@
                 </a:solidFill>
                 <a:latin typeface="Calibri"/>
               </a:rPr>
-              <a:t>•  Blockchain Suitability — Why Ethereum?</a:t>
+              <a:t>•  Why a blockchain, and why Ethereum</a:t>
             </a:r>
           </a:p>
           <a:p>
@@ -3993,7 +4349,7 @@
                 </a:solidFill>
                 <a:latin typeface="Calibri"/>
               </a:rPr>
-              <a:t>•  System Architecture, Workflow &amp; Design</a:t>
+              <a:t>•  Architecture, workflow and design</a:t>
             </a:r>
           </a:p>
           <a:p>
@@ -4009,7 +4365,23 @@
                 </a:solidFill>
                 <a:latin typeface="Calibri"/>
               </a:rPr>
-              <a:t>•  Project Planning — Timeline, Milestones, Feasibility</a:t>
+              <a:t>•  What is new in our design: verifiers put money at risk</a:t>
+            </a:r>
+          </a:p>
+          <a:p>
+            <a:pPr>
+              <a:spcAft>
+                <a:spcPts val="1000"/>
+              </a:spcAft>
+            </a:pPr>
+            <a:r>
+              <a:rPr sz="1800">
+                <a:solidFill>
+                  <a:srgbClr val="222222"/>
+                </a:solidFill>
+                <a:latin typeface="Calibri"/>
+              </a:rPr>
+              <a:t>•  Plan, feasibility and risks</a:t>
             </a:r>
           </a:p>
         </p:txBody>
@@ -4113,7 +4485,7 @@
                 </a:solidFill>
                 <a:latin typeface="Calibri"/>
               </a:rPr>
-              <a:t>1. Problem Statement</a:t>
+              <a:t>1. The Problem</a:t>
             </a:r>
           </a:p>
         </p:txBody>
@@ -4148,7 +4520,7 @@
                 </a:solidFill>
                 <a:latin typeface="Calibri"/>
               </a:rPr>
-              <a:t>The carbon market meant to fight climate change is undermined by four structural failures</a:t>
+              <a:t>A market built to cut emissions is letting companies claim cuts that never happened</a:t>
             </a:r>
           </a:p>
         </p:txBody>
@@ -4187,7 +4559,7 @@
                 </a:solidFill>
                 <a:latin typeface="Calibri"/>
               </a:rPr>
-              <a:t>•  Carbon credit = right to emit 1 tonne CO2; surplus credits are traded to reward decarbonisation.</a:t>
+              <a:t>•  One credit = permission to release one tonne of CO2. Companies that pollute less sell what they did not use.</a:t>
             </a:r>
           </a:p>
           <a:p>
@@ -4203,7 +4575,7 @@
                 </a:solidFill>
                 <a:latin typeface="Calibri"/>
               </a:rPr>
-              <a:t>•  Double-counting — same credit sold to multiple buyers across siloed registries.</a:t>
+              <a:t>•  The same credit gets counted twice, because registries are separate databases that never reconcile.</a:t>
             </a:r>
           </a:p>
           <a:p>
@@ -4219,7 +4591,7 @@
                 </a:solidFill>
                 <a:latin typeface="Calibri"/>
               </a:rPr>
-              <a:t>•  Opacity — no one can independently verify a credit or its underlying green project.</a:t>
+              <a:t>•  A buyer cannot check what it bought. It has to trust a PDF.</a:t>
             </a:r>
           </a:p>
           <a:p>
@@ -4235,7 +4607,7 @@
                 </a:solidFill>
                 <a:latin typeface="Calibri"/>
               </a:rPr>
-              <a:t>•  Fraud &amp; 'phantom credits' — credits for projects that never existed / overstated impact.</a:t>
+              <a:t>•  Phantom credits: credits issued for projects that never happened, found out years later if at all.</a:t>
             </a:r>
           </a:p>
           <a:p>
@@ -4251,7 +4623,7 @@
                 </a:solidFill>
                 <a:latin typeface="Calibri"/>
               </a:rPr>
-              <a:t>•  Slow, costly manual verification via intermediaries.</a:t>
+              <a:t>•  Checking is slow and expensive, and the fees eat money meant for climate projects.</a:t>
             </a:r>
           </a:p>
         </p:txBody>
@@ -4355,7 +4727,7 @@
                 </a:solidFill>
                 <a:latin typeface="Calibri"/>
               </a:rPr>
-              <a:t>1. Objectives &amp; Scope</a:t>
+              <a:t>1. Objectives and Scope</a:t>
             </a:r>
           </a:p>
         </p:txBody>
@@ -4390,7 +4762,7 @@
                 </a:solidFill>
                 <a:latin typeface="Calibri"/>
               </a:rPr>
-              <a:t>SDG 13 Climate Action (primary), supporting SDG 7 &amp; SDG 12</a:t>
+              <a:t>SDG 13 Climate Action, also supporting SDG 7 and SDG 12</a:t>
             </a:r>
           </a:p>
         </p:txBody>
@@ -4423,13 +4795,13 @@
               </a:spcAft>
             </a:pPr>
             <a:r>
-              <a:rPr sz="1800">
+              <a:rPr sz="1600">
                 <a:solidFill>
                   <a:srgbClr val="222222"/>
                 </a:solidFill>
                 <a:latin typeface="Calibri"/>
               </a:rPr>
-              <a:t>•  O1: Tokenise credits as unique, non-duplicable assets.</a:t>
+              <a:t>•  O1. One credit becomes one token that cannot be copied.</a:t>
             </a:r>
           </a:p>
           <a:p>
@@ -4439,13 +4811,13 @@
               </a:spcAft>
             </a:pPr>
             <a:r>
-              <a:rPr sz="1800">
+              <a:rPr sz="1600">
                 <a:solidFill>
                   <a:srgbClr val="222222"/>
                 </a:solidFill>
                 <a:latin typeface="Calibri"/>
               </a:rPr>
-              <a:t>•  O2: Automate mint / transfer / retire via smart contracts — no double-counting by design.</a:t>
+              <a:t>•  O2. Mint, sell and retire handled in contract code, so double counting is blocked by the rules.</a:t>
             </a:r>
           </a:p>
           <a:p>
@@ -4455,13 +4827,13 @@
               </a:spcAft>
             </a:pPr>
             <a:r>
-              <a:rPr sz="1800">
+              <a:rPr sz="1600">
                 <a:solidFill>
                   <a:srgbClr val="222222"/>
                 </a:solidFill>
                 <a:latin typeface="Calibri"/>
               </a:rPr>
-              <a:t>•  O3: Transparent, immutable, publicly auditable lifecycle ledger.</a:t>
+              <a:t>•  O3. A full history anyone can read and nobody can edit.</a:t>
             </a:r>
           </a:p>
           <a:p>
@@ -4471,13 +4843,13 @@
               </a:spcAft>
             </a:pPr>
             <a:r>
-              <a:rPr sz="1800">
+              <a:rPr sz="1600">
                 <a:solidFill>
                   <a:srgbClr val="222222"/>
                 </a:solidFill>
                 <a:latin typeface="Calibri"/>
               </a:rPr>
-              <a:t>•  O4: Cut intermediaries → faster, cheaper verification.</a:t>
+              <a:t>•  O4. Fewer middlemen, so verification is faster and cheaper.</a:t>
             </a:r>
           </a:p>
           <a:p>
@@ -4487,13 +4859,13 @@
               </a:spcAft>
             </a:pPr>
             <a:r>
-              <a:rPr sz="1800">
+              <a:rPr sz="1600">
                 <a:solidFill>
                   <a:srgbClr val="222222"/>
                 </a:solidFill>
                 <a:latin typeface="Calibri"/>
               </a:rPr>
-              <a:t>•  O5: Role-based authorisation (developer / verifier / buyer / regulator).</a:t>
+              <a:t>•  O5. Separate on chain roles for developer, verifier, buyer and regulator.</a:t>
             </a:r>
           </a:p>
           <a:p>
@@ -4503,13 +4875,29 @@
               </a:spcAft>
             </a:pPr>
             <a:r>
-              <a:rPr sz="1800">
+              <a:rPr sz="1600">
                 <a:solidFill>
                   <a:srgbClr val="222222"/>
                 </a:solidFill>
                 <a:latin typeface="Calibri"/>
               </a:rPr>
-              <a:t>•  Scope (DA1): design DApp, ERC-20 credits, marketplace + retirement contracts, IPFS, dashboard — not implementation.</a:t>
+              <a:t>•  O6. Verifiers lock money before approving, and lose it if the project turns out to be fake.</a:t>
+            </a:r>
+          </a:p>
+          <a:p>
+            <a:pPr>
+              <a:spcAft>
+                <a:spcPts val="1000"/>
+              </a:spcAft>
+            </a:pPr>
+            <a:r>
+              <a:rPr sz="1600">
+                <a:solidFill>
+                  <a:srgbClr val="222222"/>
+                </a:solidFill>
+                <a:latin typeface="Calibri"/>
+              </a:rPr>
+              <a:t>•  Scope of DA1: design only. No registry integration, no real money, no ML impact estimates.</a:t>
             </a:r>
           </a:p>
         </p:txBody>
@@ -4613,7 +5001,7 @@
                 </a:solidFill>
                 <a:latin typeface="Calibri"/>
               </a:rPr>
-              <a:t>2. Literature Survey</a:t>
+              <a:t>2. What Already Exists</a:t>
             </a:r>
           </a:p>
         </p:txBody>
@@ -4652,7 +5040,7 @@
                 </a:solidFill>
                 <a:latin typeface="Calibri"/>
               </a:rPr>
-              <a:t>•  Toucan Protocol — bridges credits on-chain; trusts the off-chain bridge.</a:t>
+              <a:t>•  Toucan Protocol: moved real credits on chain, but everything rests on trusting the bridge.</a:t>
             </a:r>
           </a:p>
           <a:p>
@@ -4668,7 +5056,7 @@
                 </a:solidFill>
                 <a:latin typeface="Calibri"/>
               </a:rPr>
-              <a:t>•  KlimaDAO — tokenised credits as treasury asset; speculative focus.</a:t>
+              <a:t>•  KlimaDAO: uses credits as a treasury asset. The goal is financial, not honest accounting.</a:t>
             </a:r>
           </a:p>
           <a:p>
@@ -4684,7 +5072,7 @@
                 </a:solidFill>
                 <a:latin typeface="Calibri"/>
               </a:rPr>
-              <a:t>•  IBM / Energy Web — permissioned tracking; not publicly auditable.</a:t>
+              <a:t>•  IBM and Energy Web: permissioned tracking, so the public cannot read the ledger.</a:t>
             </a:r>
           </a:p>
           <a:p>
@@ -4700,7 +5088,7 @@
                 </a:solidFill>
                 <a:latin typeface="Calibri"/>
               </a:rPr>
-              <a:t>•  Verra / Gold Standard — solid methodology but centralised &amp; siloed.</a:t>
+              <a:t>•  Verra and Gold Standard: good measurement methods, central databases that do not reconcile.</a:t>
             </a:r>
           </a:p>
           <a:p>
@@ -4716,7 +5104,7 @@
                 </a:solidFill>
                 <a:latin typeface="Calibri"/>
               </a:rPr>
-              <a:t>•  Academic surveys (2019-23) — mostly conceptual; rarely model full lifecycle.</a:t>
+              <a:t>•  Academic surveys 2019 to 2023: mostly concept level, rarely the full lifecycle in one design.</a:t>
             </a:r>
           </a:p>
         </p:txBody>
@@ -4820,7 +5208,7 @@
                 </a:solidFill>
                 <a:latin typeface="Calibri"/>
               </a:rPr>
-              <a:t>2. Research Gap</a:t>
+              <a:t>2. The Gaps We Found</a:t>
             </a:r>
           </a:p>
         </p:txBody>
@@ -4894,7 +5282,7 @@
                 </a:solidFill>
                 <a:latin typeface="Calibri"/>
               </a:rPr>
-              <a:t>•  G1 — Fragmented lifecycle: few enforce 'cannot sell after retirement'.</a:t>
+              <a:t>•  G1. The lifecycle is handled in pieces, so "cannot sell after retirement" is a policy, not code.</a:t>
             </a:r>
           </a:p>
           <a:p>
@@ -4910,7 +5298,7 @@
                 </a:solidFill>
                 <a:latin typeface="Calibri"/>
               </a:rPr>
-              <a:t>•  G2 — Weak trust anchoring: bridged credits inherit legacy flaws; evidence not bound to token.</a:t>
+              <a:t>•  G2. Evidence is loosely attached. A bridged token tells you little about where it came from.</a:t>
             </a:r>
           </a:p>
           <a:p>
@@ -4926,7 +5314,7 @@
                 </a:solidFill>
                 <a:latin typeface="Calibri"/>
               </a:rPr>
-              <a:t>•  G3 — Missing role-based governance on a public chain.</a:t>
+              <a:t>•  G3. Public chains give transparency but rarely strict on chain roles.</a:t>
             </a:r>
           </a:p>
           <a:p>
@@ -4942,7 +5330,23 @@
                 </a:solidFill>
                 <a:latin typeface="Calibri"/>
               </a:rPr>
-              <a:t>•  This project: one public-Ethereum system enforcing the full lifecycle, anchoring verifier attestations + IPFS hashes, with role-based access control.</a:t>
+              <a:t>•  G4. Nothing happens to a verifier who approves a fake project. The chain records the lie perfectly, forever, and buyers get nothing back.</a:t>
+            </a:r>
+          </a:p>
+          <a:p>
+            <a:pPr>
+              <a:spcAft>
+                <a:spcPts val="1000"/>
+              </a:spcAft>
+            </a:pPr>
+            <a:r>
+              <a:rPr sz="1800">
+                <a:solidFill>
+                  <a:srgbClr val="222222"/>
+                </a:solidFill>
+                <a:latin typeface="Calibri"/>
+              </a:rPr>
+              <a:t>•  G4 is the one we go after. Everything else assumes the data entering the chain is honest.</a:t>
             </a:r>
           </a:p>
         </p:txBody>
@@ -5046,7 +5450,7 @@
                 </a:solidFill>
                 <a:latin typeface="Calibri"/>
               </a:rPr>
-              <a:t>3. Why Blockchain? Why Ethereum?</a:t>
+              <a:t>3. Why Blockchain, and Why Ethereum</a:t>
             </a:r>
           </a:p>
         </p:txBody>
@@ -5081,7 +5485,7 @@
                 </a:solidFill>
                 <a:latin typeface="Calibri"/>
               </a:rPr>
-              <a:t>Public Ethereum chosen over permissioned Hyperledger Fabric</a:t>
+              <a:t>Public Ethereum, not permissioned Hyperledger Fabric</a:t>
             </a:r>
           </a:p>
         </p:txBody>
@@ -5114,13 +5518,13 @@
               </a:spcAft>
             </a:pPr>
             <a:r>
-              <a:rPr sz="1800">
+              <a:rPr sz="1600">
                 <a:solidFill>
                   <a:srgbClr val="222222"/>
                 </a:solidFill>
                 <a:latin typeface="Calibri"/>
               </a:rPr>
-              <a:t>•  Blockchain fits when: multiple non-trusting parties, no single authority, immutable audit trail, disintermediation adds value — carbon trading meets all four.</a:t>
+              <a:t>•  The test: parties who do not trust each other, no single owner, records that cannot be edited, middlemen worth removing. Carbon trading is yes to all four.</a:t>
             </a:r>
           </a:p>
           <a:p>
@@ -5130,13 +5534,13 @@
               </a:spcAft>
             </a:pPr>
             <a:r>
-              <a:rPr sz="1800">
+              <a:rPr sz="1600">
                 <a:solidFill>
                   <a:srgbClr val="222222"/>
                 </a:solidFill>
                 <a:latin typeface="Calibri"/>
               </a:rPr>
-              <a:t>•  Public verifiability by regulators &amp; the public → rules out permissioned Hyperledger.</a:t>
+              <a:t>•  One registry with one owner and one database is what the market has now, and that is what failed.</a:t>
             </a:r>
           </a:p>
           <a:p>
@@ -5146,13 +5550,13 @@
               </a:spcAft>
             </a:pPr>
             <a:r>
-              <a:rPr sz="1800">
+              <a:rPr sz="1600">
                 <a:solidFill>
                   <a:srgbClr val="222222"/>
                 </a:solidFill>
                 <a:latin typeface="Calibri"/>
               </a:rPr>
-              <a:t>•  ERC-20 / ERC-721 map directly onto 'one credit = one non-duplicable token'.</a:t>
+              <a:t>•  Regulators, journalists and the public need to check the records, which rules out a permissioned ledger.</a:t>
             </a:r>
           </a:p>
           <a:p>
@@ -5162,13 +5566,13 @@
               </a:spcAft>
             </a:pPr>
             <a:r>
-              <a:rPr sz="1800">
+              <a:rPr sz="1600">
                 <a:solidFill>
                   <a:srgbClr val="222222"/>
                 </a:solidFill>
                 <a:latin typeface="Calibri"/>
               </a:rPr>
-              <a:t>•  Largest ecosystem: Solidity, OpenZeppelin, MetaMask, testnets → faster, safer build.</a:t>
+              <a:t>•  ERC-20 and ERC-721 already match "one credit = one token that cannot be duplicated".</a:t>
             </a:r>
           </a:p>
           <a:p>
@@ -5178,13 +5582,29 @@
               </a:spcAft>
             </a:pPr>
             <a:r>
-              <a:rPr sz="1800">
+              <a:rPr sz="1600">
                 <a:solidFill>
                   <a:srgbClr val="222222"/>
                 </a:solidFill>
                 <a:latin typeface="Calibri"/>
               </a:rPr>
-              <a:t>•  Layer-2 (Polygon/Arbitrum) neutralises gas-cost objection.</a:t>
+              <a:t>•  Mature tooling (Solidity, OpenZeppelin, Hardhat, MetaMask, free testnets) means safer, faster building.</a:t>
+            </a:r>
+          </a:p>
+          <a:p>
+            <a:pPr>
+              <a:spcAft>
+                <a:spcPts val="1000"/>
+              </a:spcAft>
+            </a:pPr>
+            <a:r>
+              <a:rPr sz="1600">
+                <a:solidFill>
+                  <a:srgbClr val="222222"/>
+                </a:solidFill>
+                <a:latin typeface="Calibri"/>
+              </a:rPr>
+              <a:t>•  Layer 2 (Polygon, Arbitrum) drops gas to cents, so cost is no longer a real objection.</a:t>
             </a:r>
           </a:p>
         </p:txBody>
@@ -5416,7 +5836,7 @@
                 </a:solidFill>
                 <a:latin typeface="Calibri"/>
               </a:rPr>
-              <a:t>4. Carbon Credit Lifecycle Workflow</a:t>
+              <a:t>4. The Life of a Credit</a:t>
             </a:r>
           </a:p>
         </p:txBody>
